--- a/data-eng/decks/w2d2s2.pptx
+++ b/data-eng/decks/w2d2s2.pptx
@@ -4397,7 +4397,7 @@
                 <a:ea typeface="Pretendard"/>
                 <a:cs typeface="Pretendard"/>
               </a:rPr>
-              <a:t>비중: 전자 3800 · 식품 2400 · 잡화 2000, pct 합 ≈ 100.0</a:t>
+              <a:t>비중: 전자 46.3 · 식품 29.3 · 잡화 24.4, 합 100.0</a:t>
             </a:r>
           </a:p>
         </p:txBody>
@@ -6341,7 +6341,7 @@
                 <a:ea typeface="Pretendard"/>
                 <a:cs typeface="Pretendard"/>
               </a:rPr>
-              <a:t>2-1 의 de-mysql 컨테이너를 다시 켜고 shop 에 접속해 두세요 — docker start de-mysql</a:t>
+              <a:t>de-mysql 을 켜고 port: 3306 줄을 본 뒤 -e LANG=C.UTF-8 로 접속 — 실습점검 메뉴</a:t>
             </a:r>
           </a:p>
         </p:txBody>
@@ -8206,7 +8206,7 @@
                 <a:ea typeface="Pretendard"/>
                 <a:cs typeface="Pretendard"/>
               </a:rPr>
-              <a:t>전자</a:t>
+              <a:t>식품</a:t>
             </a:r>
           </a:p>
         </p:txBody>
@@ -8281,7 +8281,7 @@
                 <a:ea typeface="Pretendard"/>
                 <a:cs typeface="Pretendard"/>
               </a:rPr>
-              <a:t>1200</a:t>
+              <a:t>800</a:t>
             </a:r>
           </a:p>
         </p:txBody>
@@ -8356,7 +8356,7 @@
                 <a:ea typeface="Pretendard"/>
                 <a:cs typeface="Pretendard"/>
               </a:rPr>
-              <a:t>1500</a:t>
+              <a:t>600</a:t>
             </a:r>
           </a:p>
         </p:txBody>
@@ -8431,7 +8431,7 @@
                 <a:ea typeface="Pretendard"/>
                 <a:cs typeface="Pretendard"/>
               </a:rPr>
-              <a:t>1100</a:t>
+              <a:t>1000</a:t>
             </a:r>
           </a:p>
         </p:txBody>
@@ -8506,7 +8506,7 @@
                 <a:ea typeface="Pretendard"/>
                 <a:cs typeface="Pretendard"/>
               </a:rPr>
-              <a:t>3800</a:t>
+              <a:t>2400</a:t>
             </a:r>
           </a:p>
         </p:txBody>
@@ -8956,7 +8956,7 @@
                 <a:ea typeface="Pretendard"/>
                 <a:cs typeface="Pretendard"/>
               </a:rPr>
-              <a:t>식품</a:t>
+              <a:t>전자</a:t>
             </a:r>
           </a:p>
         </p:txBody>
@@ -9031,7 +9031,7 @@
                 <a:ea typeface="Pretendard"/>
                 <a:cs typeface="Pretendard"/>
               </a:rPr>
-              <a:t>800</a:t>
+              <a:t>1200</a:t>
             </a:r>
           </a:p>
         </p:txBody>
@@ -9106,7 +9106,7 @@
                 <a:ea typeface="Pretendard"/>
                 <a:cs typeface="Pretendard"/>
               </a:rPr>
-              <a:t>600</a:t>
+              <a:t>1500</a:t>
             </a:r>
           </a:p>
         </p:txBody>
@@ -9181,7 +9181,7 @@
                 <a:ea typeface="Pretendard"/>
                 <a:cs typeface="Pretendard"/>
               </a:rPr>
-              <a:t>1000</a:t>
+              <a:t>1100</a:t>
             </a:r>
           </a:p>
         </p:txBody>
@@ -9256,7 +9256,7 @@
                 <a:ea typeface="Pretendard"/>
                 <a:cs typeface="Pretendard"/>
               </a:rPr>
-              <a:t>2400</a:t>
+              <a:t>3800</a:t>
             </a:r>
           </a:p>
         </p:txBody>
@@ -9672,7 +9672,7 @@
                 <a:ea typeface="Pretendard"/>
                 <a:cs typeface="Pretendard"/>
               </a:rPr>
-              <a:t>category VARCHAR(50) · ym CHAR(7) 'YYYY-MM' · amount INT · UNIQUE KEY uq_cat_ym (category, ym) — COUNT(*) 가 9 여야 다음으로</a:t>
+              <a:t>UNIQUE KEY uq_cat_ym (category, ym) — COUNT(*) 9. 전체 조회는 ORDER BY category 라 식품 → 잡화 → 전자 순</a:t>
             </a:r>
           </a:p>
         </p:txBody>
@@ -10337,7 +10337,7 @@
                 <a:ea typeface="Pretendard"/>
                 <a:cs typeface="Pretendard"/>
               </a:rPr>
-              <a:t>Duplicate entry '전자-2026-01' for key</a:t>
+              <a:t>ERROR 1062 Duplicate entry '전자-2026-01'</a:t>
             </a:r>
           </a:p>
         </p:txBody>
@@ -10378,7 +10378,7 @@
                 <a:ea typeface="Pretendard"/>
                 <a:cs typeface="Pretendard"/>
               </a:rPr>
-              <a:t>이 오류가 나야 정상 — UNIQUE KEY 가 중복 적재를 막았다</a:t>
+              <a:t>for key 'monthly_sales.uq_cat_ym' — UNIQUE KEY 가 막았다</a:t>
             </a:r>
           </a:p>
         </p:txBody>
@@ -13839,7 +13839,7 @@
                 <a:ea typeface="Pretendard"/>
                 <a:cs typeface="Pretendard"/>
               </a:rPr>
-              <a:t>확인 포인트: 전자 3800 · 식품 2400 · 잡화 2000, pct 합이 100.0 에 가깝다 (반올림 오차 허용)</a:t>
+              <a:t>확인 포인트: 전자 3800 · 46.3, 식품 2400 · 29.3, 잡화 2000 · 24.4 — pct 합 100.0</a:t>
             </a:r>
           </a:p>
         </p:txBody>

--- a/data-eng/decks/w2d2s2.pptx
+++ b/data-eng/decks/w2d2s2.pptx
@@ -14397,7 +14397,7 @@
                 <a:ea typeface="Pretendard"/>
                 <a:cs typeface="Pretendard"/>
               </a:rPr>
-              <a:t>전자 1266.7 · 식품 800.0 · 잡화 666.7</a:t>
+              <a:t>전자 1266.7 · 식품 800 · 잡화 666.7</a:t>
             </a:r>
           </a:p>
         </p:txBody>
@@ -14564,7 +14564,7 @@
                 <a:ea typeface="Pretendard"/>
                 <a:cs typeface="Pretendard"/>
               </a:rPr>
-              <a:t>AVG(avg_amount) FROM cat_avg</a:t>
+              <a:t>세 월평균의 평균</a:t>
             </a:r>
           </a:p>
           <a:p>
@@ -14582,7 +14582,7 @@
                 <a:ea typeface="Pretendard"/>
                 <a:cs typeface="Pretendard"/>
               </a:rPr>
-              <a:t>= 911.1</a:t>
+              <a:t>911.1</a:t>
             </a:r>
           </a:p>
         </p:txBody>
@@ -14604,11 +14604,11 @@
             </a:avLst>
           </a:prstGeom>
           <a:solidFill>
-            <a:srgbClr val="FAFBFD"/>
+            <a:srgbClr val="0D2B5E"/>
           </a:solidFill>
           <a:ln w="9525">
             <a:solidFill>
-              <a:srgbClr val="DCE1E8"/>
+              <a:srgbClr val="0D2B5E"/>
             </a:solidFill>
           </a:ln>
           <a:effectLst/>
@@ -14681,7 +14681,7 @@
             <a:r>
               <a:rPr sz="2550" b="1">
                 <a:solidFill>
-                  <a:srgbClr val="E4EBF4"/>
+                  <a:srgbClr val="3B4B7C"/>
                 </a:solidFill>
                 <a:latin typeface="Pretendard"/>
                 <a:ea typeface="Pretendard"/>
@@ -14722,7 +14722,7 @@
             <a:r>
               <a:rPr sz="3150" b="1">
                 <a:solidFill>
-                  <a:srgbClr val="0D2B5E"/>
+                  <a:srgbClr val="FFFFFF"/>
                 </a:solidFill>
                 <a:latin typeface="Pretendard"/>
                 <a:ea typeface="Pretendard"/>
@@ -14743,7 +14743,7 @@
             <a:r>
               <a:rPr sz="2250" b="0">
                 <a:solidFill>
-                  <a:srgbClr val="3D3D3D"/>
+                  <a:srgbClr val="D9E2F0"/>
                 </a:solidFill>
                 <a:latin typeface="Pretendard"/>
                 <a:ea typeface="Pretendard"/>
@@ -14761,13 +14761,13 @@
             <a:r>
               <a:rPr sz="2250" b="0">
                 <a:solidFill>
-                  <a:srgbClr val="3D3D3D"/>
-                </a:solidFill>
-                <a:latin typeface="Pretendard"/>
-                <a:ea typeface="Pretendard"/>
-                <a:cs typeface="Pretendard"/>
-              </a:rPr>
-              <a:t>WHERE c.avg_amount &gt; o.overall_avg</a:t>
+                  <a:srgbClr val="D9E2F0"/>
+                </a:solidFill>
+                <a:latin typeface="Pretendard"/>
+                <a:ea typeface="Pretendard"/>
+                <a:cs typeface="Pretendard"/>
+              </a:rPr>
+              <a:t>WHERE avg_amount &gt; overall_avg</a:t>
             </a:r>
           </a:p>
         </p:txBody>
